--- a/img/Framework.pptx
+++ b/img/Framework.pptx
@@ -212,7 +212,7 @@
             <a:fld id="{F6490402-8E07-BB4F-A189-6AD7200B2129}" type="datetime1">
               <a:rPr lang="en-US" smtClean="0"/>
               <a:pPr/>
-              <a:t>3/26/2026</a:t>
+              <a:t>3/27/2026</a:t>
             </a:fld>
             <a:endParaRPr lang="sv-SE"/>
           </a:p>
@@ -380,7 +380,7 @@
             <a:fld id="{69A8E3D5-343E-3741-80FE-788E6CEB802F}" type="datetime1">
               <a:rPr lang="en-US" smtClean="0"/>
               <a:pPr/>
-              <a:t>3/26/2026</a:t>
+              <a:t>3/27/2026</a:t>
             </a:fld>
             <a:endParaRPr lang="sv-SE"/>
           </a:p>
@@ -780,7 +780,7 @@
           <a:p>
             <a:fld id="{7B519FBF-7997-4411-96DF-F0BD12B557A7}" type="datetimeFigureOut">
               <a:rPr lang="en-US" smtClean="0"/>
-              <a:t>3/26/2026</a:t>
+              <a:t>3/27/2026</a:t>
             </a:fld>
             <a:endParaRPr lang="en-US"/>
           </a:p>
@@ -951,7 +951,7 @@
           <a:p>
             <a:fld id="{7B519FBF-7997-4411-96DF-F0BD12B557A7}" type="datetimeFigureOut">
               <a:rPr lang="en-US" smtClean="0"/>
-              <a:t>3/26/2026</a:t>
+              <a:t>3/27/2026</a:t>
             </a:fld>
             <a:endParaRPr lang="en-US"/>
           </a:p>
@@ -1132,7 +1132,7 @@
           <a:p>
             <a:fld id="{7B519FBF-7997-4411-96DF-F0BD12B557A7}" type="datetimeFigureOut">
               <a:rPr lang="en-US" smtClean="0"/>
-              <a:t>3/26/2026</a:t>
+              <a:t>3/27/2026</a:t>
             </a:fld>
             <a:endParaRPr lang="en-US"/>
           </a:p>
@@ -2391,7 +2391,7 @@
           <a:p>
             <a:fld id="{7B519FBF-7997-4411-96DF-F0BD12B557A7}" type="datetimeFigureOut">
               <a:rPr lang="en-US" smtClean="0"/>
-              <a:t>3/26/2026</a:t>
+              <a:t>3/27/2026</a:t>
             </a:fld>
             <a:endParaRPr lang="en-US"/>
           </a:p>
@@ -4015,7 +4015,7 @@
           <a:p>
             <a:fld id="{AD44E00C-ED33-1B4E-93F4-10B93425767A}" type="datetime1">
               <a:rPr lang="sv-SE" smtClean="0"/>
-              <a:t>2026-03-26</a:t>
+              <a:t>2026-03-27</a:t>
             </a:fld>
             <a:endParaRPr lang="sv-SE" dirty="0"/>
           </a:p>
@@ -4248,7 +4248,7 @@
           <a:p>
             <a:fld id="{3601522F-72A4-D947-90FE-F3A7447C6B04}" type="datetime1">
               <a:rPr lang="sv-SE" smtClean="0"/>
-              <a:t>2026-03-26</a:t>
+              <a:t>2026-03-27</a:t>
             </a:fld>
             <a:endParaRPr lang="sv-SE" dirty="0"/>
           </a:p>
@@ -4659,7 +4659,7 @@
           <a:p>
             <a:fld id="{7B519FBF-7997-4411-96DF-F0BD12B557A7}" type="datetimeFigureOut">
               <a:rPr lang="en-US" smtClean="0"/>
-              <a:t>3/26/2026</a:t>
+              <a:t>3/27/2026</a:t>
             </a:fld>
             <a:endParaRPr lang="en-US"/>
           </a:p>
@@ -4842,7 +4842,7 @@
           <a:p>
             <a:fld id="{61425181-CC23-B143-A546-E58678C10757}" type="datetime1">
               <a:rPr lang="sv-SE" smtClean="0"/>
-              <a:t>2026-03-26</a:t>
+              <a:t>2026-03-27</a:t>
             </a:fld>
             <a:endParaRPr lang="sv-SE" dirty="0"/>
           </a:p>
@@ -6057,7 +6057,7 @@
           <a:p>
             <a:fld id="{7B519FBF-7997-4411-96DF-F0BD12B557A7}" type="datetimeFigureOut">
               <a:rPr lang="en-US" smtClean="0"/>
-              <a:t>3/26/2026</a:t>
+              <a:t>3/27/2026</a:t>
             </a:fld>
             <a:endParaRPr lang="en-US"/>
           </a:p>
@@ -6425,7 +6425,7 @@
           <a:p>
             <a:fld id="{7B519FBF-7997-4411-96DF-F0BD12B557A7}" type="datetimeFigureOut">
               <a:rPr lang="en-US" smtClean="0"/>
-              <a:t>3/26/2026</a:t>
+              <a:t>3/27/2026</a:t>
             </a:fld>
             <a:endParaRPr lang="en-US"/>
           </a:p>
@@ -6544,7 +6544,7 @@
           <a:p>
             <a:fld id="{7B519FBF-7997-4411-96DF-F0BD12B557A7}" type="datetimeFigureOut">
               <a:rPr lang="en-US" smtClean="0"/>
-              <a:t>3/26/2026</a:t>
+              <a:t>3/27/2026</a:t>
             </a:fld>
             <a:endParaRPr lang="en-US"/>
           </a:p>
@@ -6640,7 +6640,7 @@
           <a:p>
             <a:fld id="{7B519FBF-7997-4411-96DF-F0BD12B557A7}" type="datetimeFigureOut">
               <a:rPr lang="en-US" smtClean="0"/>
-              <a:t>3/26/2026</a:t>
+              <a:t>3/27/2026</a:t>
             </a:fld>
             <a:endParaRPr lang="en-US"/>
           </a:p>
@@ -6918,7 +6918,7 @@
           <a:p>
             <a:fld id="{7B519FBF-7997-4411-96DF-F0BD12B557A7}" type="datetimeFigureOut">
               <a:rPr lang="en-US" smtClean="0"/>
-              <a:t>3/26/2026</a:t>
+              <a:t>3/27/2026</a:t>
             </a:fld>
             <a:endParaRPr lang="en-US"/>
           </a:p>
@@ -7176,7 +7176,7 @@
           <a:p>
             <a:fld id="{7B519FBF-7997-4411-96DF-F0BD12B557A7}" type="datetimeFigureOut">
               <a:rPr lang="en-US" smtClean="0"/>
-              <a:t>3/26/2026</a:t>
+              <a:t>3/27/2026</a:t>
             </a:fld>
             <a:endParaRPr lang="en-US"/>
           </a:p>
@@ -7390,7 +7390,7 @@
           <a:p>
             <a:fld id="{7B519FBF-7997-4411-96DF-F0BD12B557A7}" type="datetimeFigureOut">
               <a:rPr lang="en-US" smtClean="0"/>
-              <a:t>3/26/2026</a:t>
+              <a:t>3/27/2026</a:t>
             </a:fld>
             <a:endParaRPr lang="en-US"/>
           </a:p>
@@ -8903,7 +8903,7 @@
           <p:spPr>
             <a:xfrm>
               <a:off x="2130257" y="1575360"/>
-              <a:ext cx="1293664" cy="470238"/>
+              <a:ext cx="1293663" cy="435679"/>
             </a:xfrm>
             <a:prstGeom prst="rect">
               <a:avLst/>
@@ -8917,7 +8917,7 @@
             <a:lstStyle/>
             <a:p>
               <a:r>
-                <a:rPr lang="en-IE" sz="2204" b="1" dirty="0">
+                <a:rPr lang="en-IE" sz="2000" b="1" dirty="0">
                   <a:latin typeface="Aptos" panose="020B0004020202020204" pitchFamily="34" charset="0"/>
                 </a:rPr>
                 <a:t>5G/6G</a:t>
@@ -8940,7 +8940,7 @@
           <p:spPr>
             <a:xfrm>
               <a:off x="4396138" y="1557887"/>
-              <a:ext cx="1293664" cy="470238"/>
+              <a:ext cx="1293663" cy="435679"/>
             </a:xfrm>
             <a:prstGeom prst="rect">
               <a:avLst/>
@@ -8955,7 +8955,7 @@
             <a:p>
               <a:pPr algn="ctr"/>
               <a:r>
-                <a:rPr lang="en-IE" sz="2204" b="1" dirty="0">
+                <a:rPr lang="en-IE" sz="2000" b="1" dirty="0">
                   <a:latin typeface="Aptos" panose="020B0004020202020204" pitchFamily="34" charset="0"/>
                 </a:rPr>
                 <a:t>IoT</a:t>
@@ -8977,8 +8977,8 @@
           </p:nvSpPr>
           <p:spPr>
             <a:xfrm>
-              <a:off x="6388255" y="1530372"/>
-              <a:ext cx="2016771" cy="470238"/>
+              <a:off x="6388255" y="1530373"/>
+              <a:ext cx="2016771" cy="435679"/>
             </a:xfrm>
             <a:prstGeom prst="rect">
               <a:avLst/>
@@ -8993,7 +8993,7 @@
             <a:p>
               <a:pPr algn="ctr"/>
               <a:r>
-                <a:rPr lang="en-IE" sz="2204" b="1" dirty="0">
+                <a:rPr lang="en-IE" sz="2000" b="1" dirty="0">
                   <a:latin typeface="Aptos" panose="020B0004020202020204" pitchFamily="34" charset="0"/>
                 </a:rPr>
                 <a:t>Aquaculture</a:t>
@@ -9016,7 +9016,7 @@
           <p:spPr>
             <a:xfrm>
               <a:off x="8930783" y="1504036"/>
-              <a:ext cx="1621933" cy="469890"/>
+              <a:ext cx="1621933" cy="435679"/>
             </a:xfrm>
             <a:prstGeom prst="rect">
               <a:avLst/>
@@ -9031,7 +9031,7 @@
             <a:p>
               <a:pPr algn="ctr"/>
               <a:r>
-                <a:rPr lang="en-IE" sz="2204" b="1" dirty="0">
+                <a:rPr lang="en-IE" sz="2000" b="1" dirty="0">
                   <a:latin typeface="Aptos" panose="020B0004020202020204" pitchFamily="34" charset="0"/>
                 </a:rPr>
                 <a:t>Sensing</a:t>
@@ -9064,6 +9064,9 @@
                 <a:lumMod val="90000"/>
               </a:schemeClr>
             </a:solidFill>
+            <a:ln>
+              <a:noFill/>
+            </a:ln>
           </p:spPr>
           <p:style>
             <a:lnRef idx="2">
